--- a/School deliverables/presentation/Unmasking Go Ransomware.pptx
+++ b/School deliverables/presentation/Unmasking Go Ransomware.pptx
@@ -14002,7 +14002,7 @@
         <p:spPr>
           <a:xfrm>
             <a:off x="4052887" y="3829050"/>
-            <a:ext cx="4086225" cy="723900"/>
+            <a:ext cx="4086300" cy="369300"/>
           </a:xfrm>
           <a:prstGeom prst="rect">
             <a:avLst/>
@@ -14037,19 +14037,19 @@
                 <a:cs typeface="Urbanist SemiBold"/>
                 <a:sym typeface="Urbanist SemiBold"/>
               </a:rPr>
-              <a:t>William Elias | contact@williamelias.edu</a:t>
+              <a:t>William Elias | contact@</a:t>
             </a:r>
             <a:r>
-              <a:rPr b="0" i="0" lang="en-US" sz="1200" u="none" cap="none" strike="noStrike">
+              <a:rPr lang="en-US" sz="1200">
                 <a:solidFill>
-                  <a:srgbClr val="000000"/>
+                  <a:srgbClr val="CCFF00"/>
                 </a:solidFill>
-                <a:latin typeface="Urbanist"/>
-                <a:ea typeface="Urbanist"/>
-                <a:cs typeface="Urbanist"/>
-                <a:sym typeface="Urbanist"/>
+                <a:latin typeface="Urbanist SemiBold"/>
+                <a:ea typeface="Urbanist SemiBold"/>
+                <a:cs typeface="Urbanist SemiBold"/>
+                <a:sym typeface="Urbanist SemiBold"/>
               </a:rPr>
-              <a:t> </a:t>
+              <a:t>William.Elias@trojans.dsu.edu</a:t>
             </a:r>
             <a:r>
               <a:rPr b="0" i="0" lang="en-US" sz="1200" u="none" cap="none" strike="noStrike">
@@ -16631,7 +16631,7 @@
             <a:tbl>
               <a:tblPr bandRow="1" firstRow="1">
                 <a:noFill/>
-                <a:tableStyleId>{5A66AAD9-A6F4-4AE0-A7E8-BD68966AC5FF}</a:tableStyleId>
+                <a:tableStyleId>{5BD91738-F0D5-4590-AA49-023E812DB9F7}</a:tableStyleId>
               </a:tblPr>
               <a:tblGrid>
                 <a:gridCol w="2114550"/>
@@ -19681,6 +19681,285 @@
 </file>
 
 <file path=ppt/theme/theme1.xml><?xml version="1.0" encoding="utf-8"?>
+<a:theme xmlns:a="http://schemas.openxmlformats.org/drawingml/2006/main" xmlns:r="http://schemas.openxmlformats.org/officeDocument/2006/relationships">
+  <a:themeElements>
+    <a:clrScheme name="Default">
+      <a:dk1>
+        <a:srgbClr val="000000"/>
+      </a:dk1>
+      <a:lt1>
+        <a:srgbClr val="FFFFFF"/>
+      </a:lt1>
+      <a:dk2>
+        <a:srgbClr val="158158"/>
+      </a:dk2>
+      <a:lt2>
+        <a:srgbClr val="F3F3F3"/>
+      </a:lt2>
+      <a:accent1>
+        <a:srgbClr val="058DC7"/>
+      </a:accent1>
+      <a:accent2>
+        <a:srgbClr val="50B432"/>
+      </a:accent2>
+      <a:accent3>
+        <a:srgbClr val="ED561B"/>
+      </a:accent3>
+      <a:accent4>
+        <a:srgbClr val="EDEF00"/>
+      </a:accent4>
+      <a:accent5>
+        <a:srgbClr val="24CBE5"/>
+      </a:accent5>
+      <a:accent6>
+        <a:srgbClr val="64E572"/>
+      </a:accent6>
+      <a:hlink>
+        <a:srgbClr val="2200CC"/>
+      </a:hlink>
+      <a:folHlink>
+        <a:srgbClr val="551A8B"/>
+      </a:folHlink>
+    </a:clrScheme>
+    <a:fontScheme name="Office">
+      <a:majorFont>
+        <a:latin typeface="Arial"/>
+        <a:ea typeface=""/>
+        <a:cs typeface=""/>
+        <a:font script="Jpan" typeface="ＭＳ Ｐゴシック"/>
+        <a:font script="Hang" typeface="맑은 고딕"/>
+        <a:font script="Hans" typeface="宋体"/>
+        <a:font script="Hant" typeface="新細明體"/>
+        <a:font script="Arab" typeface="Times New Roman"/>
+        <a:font script="Hebr" typeface="Times New Roman"/>
+        <a:font script="Thai" typeface="Angsana New"/>
+        <a:font script="Ethi" typeface="Nyala"/>
+        <a:font script="Beng" typeface="Vrinda"/>
+        <a:font script="Gujr" typeface="Shruti"/>
+        <a:font script="Khmr" typeface="MoolBoran"/>
+        <a:font script="Knda" typeface="Tunga"/>
+        <a:font script="Guru" typeface="Raavi"/>
+        <a:font script="Cans" typeface="Euphemia"/>
+        <a:font script="Cher" typeface="Plantagenet Cherokee"/>
+        <a:font script="Yiii" typeface="Microsoft Yi Baiti"/>
+        <a:font script="Tibt" typeface="Microsoft Himalaya"/>
+        <a:font script="Thaa" typeface="MV Boli"/>
+        <a:font script="Deva" typeface="Mangal"/>
+        <a:font script="Telu" typeface="Gautami"/>
+        <a:font script="Taml" typeface="Latha"/>
+        <a:font script="Syrc" typeface="Estrangelo Edessa"/>
+        <a:font script="Orya" typeface="Kalinga"/>
+        <a:font script="Mlym" typeface="Kartika"/>
+        <a:font script="Laoo" typeface="DokChampa"/>
+        <a:font script="Sinh" typeface="Iskoola Pota"/>
+        <a:font script="Mong" typeface="Mongolian Baiti"/>
+        <a:font script="Viet" typeface="Times New Roman"/>
+        <a:font script="Uigh" typeface="Microsoft Uighur"/>
+        <a:font script="Geor" typeface="Sylfaen"/>
+      </a:majorFont>
+      <a:minorFont>
+        <a:latin typeface="Arial"/>
+        <a:ea typeface=""/>
+        <a:cs typeface=""/>
+        <a:font script="Jpan" typeface="ＭＳ Ｐゴシック"/>
+        <a:font script="Hang" typeface="맑은 고딕"/>
+        <a:font script="Hans" typeface="宋体"/>
+        <a:font script="Hant" typeface="新細明體"/>
+        <a:font script="Arab" typeface="Arial"/>
+        <a:font script="Hebr" typeface="Arial"/>
+        <a:font script="Thai" typeface="Cordia New"/>
+        <a:font script="Ethi" typeface="Nyala"/>
+        <a:font script="Beng" typeface="Vrinda"/>
+        <a:font script="Gujr" typeface="Shruti"/>
+        <a:font script="Khmr" typeface="DaunPenh"/>
+        <a:font script="Knda" typeface="Tunga"/>
+        <a:font script="Guru" typeface="Raavi"/>
+        <a:font script="Cans" typeface="Euphemia"/>
+        <a:font script="Cher" typeface="Plantagenet Cherokee"/>
+        <a:font script="Yiii" typeface="Microsoft Yi Baiti"/>
+        <a:font script="Tibt" typeface="Microsoft Himalaya"/>
+        <a:font script="Thaa" typeface="MV Boli"/>
+        <a:font script="Deva" typeface="Mangal"/>
+        <a:font script="Telu" typeface="Gautami"/>
+        <a:font script="Taml" typeface="Latha"/>
+        <a:font script="Syrc" typeface="Estrangelo Edessa"/>
+        <a:font script="Orya" typeface="Kalinga"/>
+        <a:font script="Mlym" typeface="Kartika"/>
+        <a:font script="Laoo" typeface="DokChampa"/>
+        <a:font script="Sinh" typeface="Iskoola Pota"/>
+        <a:font script="Mong" typeface="Mongolian Baiti"/>
+        <a:font script="Viet" typeface="Arial"/>
+        <a:font script="Uigh" typeface="Microsoft Uighur"/>
+        <a:font script="Geor" typeface="Sylfaen"/>
+      </a:minorFont>
+    </a:fontScheme>
+    <a:fmtScheme name="Office">
+      <a:fillStyleLst>
+        <a:solidFill>
+          <a:schemeClr val="phClr"/>
+        </a:solidFill>
+        <a:gradFill rotWithShape="1">
+          <a:gsLst>
+            <a:gs pos="0">
+              <a:schemeClr val="phClr">
+                <a:tint val="50000"/>
+                <a:satMod val="300000"/>
+              </a:schemeClr>
+            </a:gs>
+            <a:gs pos="35000">
+              <a:schemeClr val="phClr">
+                <a:tint val="37000"/>
+                <a:satMod val="300000"/>
+              </a:schemeClr>
+            </a:gs>
+            <a:gs pos="100000">
+              <a:schemeClr val="phClr">
+                <a:tint val="15000"/>
+                <a:satMod val="350000"/>
+              </a:schemeClr>
+            </a:gs>
+          </a:gsLst>
+          <a:lin ang="16200000" scaled="1"/>
+        </a:gradFill>
+        <a:gradFill rotWithShape="1">
+          <a:gsLst>
+            <a:gs pos="0">
+              <a:schemeClr val="phClr">
+                <a:tint val="100000"/>
+                <a:shade val="100000"/>
+                <a:satMod val="130000"/>
+              </a:schemeClr>
+            </a:gs>
+            <a:gs pos="100000">
+              <a:schemeClr val="phClr">
+                <a:tint val="50000"/>
+                <a:shade val="100000"/>
+                <a:satMod val="350000"/>
+              </a:schemeClr>
+            </a:gs>
+          </a:gsLst>
+          <a:lin ang="16200000" scaled="0"/>
+        </a:gradFill>
+      </a:fillStyleLst>
+      <a:lnStyleLst>
+        <a:ln w="9525" cap="flat" cmpd="sng" algn="ctr">
+          <a:solidFill>
+            <a:schemeClr val="phClr">
+              <a:shade val="95000"/>
+              <a:satMod val="105000"/>
+            </a:schemeClr>
+          </a:solidFill>
+          <a:prstDash val="solid"/>
+        </a:ln>
+        <a:ln w="25400" cap="flat" cmpd="sng" algn="ctr">
+          <a:solidFill>
+            <a:schemeClr val="phClr"/>
+          </a:solidFill>
+          <a:prstDash val="solid"/>
+        </a:ln>
+        <a:ln w="38100" cap="flat" cmpd="sng" algn="ctr">
+          <a:solidFill>
+            <a:schemeClr val="phClr"/>
+          </a:solidFill>
+          <a:prstDash val="solid"/>
+        </a:ln>
+      </a:lnStyleLst>
+      <a:effectStyleLst>
+        <a:effectStyle>
+          <a:effectLst>
+            <a:outerShdw blurRad="40000" dist="20000" dir="5400000" rotWithShape="0">
+              <a:srgbClr val="000000">
+                <a:alpha val="38000"/>
+              </a:srgbClr>
+            </a:outerShdw>
+          </a:effectLst>
+        </a:effectStyle>
+        <a:effectStyle>
+          <a:effectLst>
+            <a:outerShdw blurRad="40000" dist="23000" dir="5400000" rotWithShape="0">
+              <a:srgbClr val="000000">
+                <a:alpha val="35000"/>
+              </a:srgbClr>
+            </a:outerShdw>
+          </a:effectLst>
+        </a:effectStyle>
+        <a:effectStyle>
+          <a:effectLst>
+            <a:outerShdw blurRad="40000" dist="23000" dir="5400000" rotWithShape="0">
+              <a:srgbClr val="000000">
+                <a:alpha val="35000"/>
+              </a:srgbClr>
+            </a:outerShdw>
+          </a:effectLst>
+          <a:scene3d>
+            <a:camera prst="orthographicFront">
+              <a:rot lat="0" lon="0" rev="0"/>
+            </a:camera>
+            <a:lightRig rig="threePt" dir="t">
+              <a:rot lat="0" lon="0" rev="1200000"/>
+            </a:lightRig>
+          </a:scene3d>
+          <a:sp3d>
+            <a:bevelT w="63500" h="25400"/>
+          </a:sp3d>
+        </a:effectStyle>
+      </a:effectStyleLst>
+      <a:bgFillStyleLst>
+        <a:solidFill>
+          <a:schemeClr val="phClr"/>
+        </a:solidFill>
+        <a:gradFill rotWithShape="1">
+          <a:gsLst>
+            <a:gs pos="0">
+              <a:schemeClr val="phClr">
+                <a:tint val="40000"/>
+                <a:satMod val="350000"/>
+              </a:schemeClr>
+            </a:gs>
+            <a:gs pos="40000">
+              <a:schemeClr val="phClr">
+                <a:tint val="45000"/>
+                <a:shade val="99000"/>
+                <a:satMod val="350000"/>
+              </a:schemeClr>
+            </a:gs>
+            <a:gs pos="100000">
+              <a:schemeClr val="phClr">
+                <a:shade val="20000"/>
+                <a:satMod val="255000"/>
+              </a:schemeClr>
+            </a:gs>
+          </a:gsLst>
+          <a:path path="circle">
+            <a:fillToRect l="50000" t="-80000" r="50000" b="180000"/>
+          </a:path>
+        </a:gradFill>
+        <a:gradFill rotWithShape="1">
+          <a:gsLst>
+            <a:gs pos="0">
+              <a:schemeClr val="phClr">
+                <a:tint val="80000"/>
+                <a:satMod val="300000"/>
+              </a:schemeClr>
+            </a:gs>
+            <a:gs pos="100000">
+              <a:schemeClr val="phClr">
+                <a:shade val="30000"/>
+                <a:satMod val="200000"/>
+              </a:schemeClr>
+            </a:gs>
+          </a:gsLst>
+          <a:path path="circle">
+            <a:fillToRect l="50000" t="50000" r="50000" b="50000"/>
+          </a:path>
+        </a:gradFill>
+      </a:bgFillStyleLst>
+    </a:fmtScheme>
+  </a:themeElements>
+</a:theme>
+</file>
+
+<file path=ppt/theme/theme2.xml><?xml version="1.0" encoding="utf-8"?>
 <a:theme xmlns:a="http://schemas.openxmlformats.org/drawingml/2006/main" xmlns:r="http://schemas.openxmlformats.org/officeDocument/2006/relationships" name="Office Theme">
   <a:themeElements>
     <a:clrScheme name="Office">
@@ -19957,283 +20236,4 @@
     </a:fmtScheme>
   </a:themeElements>
 </a:theme>
-</file>
-
-<file path=ppt/theme/theme2.xml><?xml version="1.0" encoding="utf-8"?>
-<a:theme xmlns:a="http://schemas.openxmlformats.org/drawingml/2006/main" xmlns:r="http://schemas.openxmlformats.org/officeDocument/2006/relationships">
-  <a:themeElements>
-    <a:clrScheme name="Default">
-      <a:dk1>
-        <a:srgbClr val="000000"/>
-      </a:dk1>
-      <a:lt1>
-        <a:srgbClr val="FFFFFF"/>
-      </a:lt1>
-      <a:dk2>
-        <a:srgbClr val="158158"/>
-      </a:dk2>
-      <a:lt2>
-        <a:srgbClr val="F3F3F3"/>
-      </a:lt2>
-      <a:accent1>
-        <a:srgbClr val="058DC7"/>
-      </a:accent1>
-      <a:accent2>
-        <a:srgbClr val="50B432"/>
-      </a:accent2>
-      <a:accent3>
-        <a:srgbClr val="ED561B"/>
-      </a:accent3>
-      <a:accent4>
-        <a:srgbClr val="EDEF00"/>
-      </a:accent4>
-      <a:accent5>
-        <a:srgbClr val="24CBE5"/>
-      </a:accent5>
-      <a:accent6>
-        <a:srgbClr val="64E572"/>
-      </a:accent6>
-      <a:hlink>
-        <a:srgbClr val="2200CC"/>
-      </a:hlink>
-      <a:folHlink>
-        <a:srgbClr val="551A8B"/>
-      </a:folHlink>
-    </a:clrScheme>
-    <a:fontScheme name="Office">
-      <a:majorFont>
-        <a:latin typeface="Arial"/>
-        <a:ea typeface=""/>
-        <a:cs typeface=""/>
-        <a:font script="Jpan" typeface="ＭＳ Ｐゴシック"/>
-        <a:font script="Hang" typeface="맑은 고딕"/>
-        <a:font script="Hans" typeface="宋体"/>
-        <a:font script="Hant" typeface="新細明體"/>
-        <a:font script="Arab" typeface="Times New Roman"/>
-        <a:font script="Hebr" typeface="Times New Roman"/>
-        <a:font script="Thai" typeface="Angsana New"/>
-        <a:font script="Ethi" typeface="Nyala"/>
-        <a:font script="Beng" typeface="Vrinda"/>
-        <a:font script="Gujr" typeface="Shruti"/>
-        <a:font script="Khmr" typeface="MoolBoran"/>
-        <a:font script="Knda" typeface="Tunga"/>
-        <a:font script="Guru" typeface="Raavi"/>
-        <a:font script="Cans" typeface="Euphemia"/>
-        <a:font script="Cher" typeface="Plantagenet Cherokee"/>
-        <a:font script="Yiii" typeface="Microsoft Yi Baiti"/>
-        <a:font script="Tibt" typeface="Microsoft Himalaya"/>
-        <a:font script="Thaa" typeface="MV Boli"/>
-        <a:font script="Deva" typeface="Mangal"/>
-        <a:font script="Telu" typeface="Gautami"/>
-        <a:font script="Taml" typeface="Latha"/>
-        <a:font script="Syrc" typeface="Estrangelo Edessa"/>
-        <a:font script="Orya" typeface="Kalinga"/>
-        <a:font script="Mlym" typeface="Kartika"/>
-        <a:font script="Laoo" typeface="DokChampa"/>
-        <a:font script="Sinh" typeface="Iskoola Pota"/>
-        <a:font script="Mong" typeface="Mongolian Baiti"/>
-        <a:font script="Viet" typeface="Times New Roman"/>
-        <a:font script="Uigh" typeface="Microsoft Uighur"/>
-        <a:font script="Geor" typeface="Sylfaen"/>
-      </a:majorFont>
-      <a:minorFont>
-        <a:latin typeface="Arial"/>
-        <a:ea typeface=""/>
-        <a:cs typeface=""/>
-        <a:font script="Jpan" typeface="ＭＳ Ｐゴシック"/>
-        <a:font script="Hang" typeface="맑은 고딕"/>
-        <a:font script="Hans" typeface="宋体"/>
-        <a:font script="Hant" typeface="新細明體"/>
-        <a:font script="Arab" typeface="Arial"/>
-        <a:font script="Hebr" typeface="Arial"/>
-        <a:font script="Thai" typeface="Cordia New"/>
-        <a:font script="Ethi" typeface="Nyala"/>
-        <a:font script="Beng" typeface="Vrinda"/>
-        <a:font script="Gujr" typeface="Shruti"/>
-        <a:font script="Khmr" typeface="DaunPenh"/>
-        <a:font script="Knda" typeface="Tunga"/>
-        <a:font script="Guru" typeface="Raavi"/>
-        <a:font script="Cans" typeface="Euphemia"/>
-        <a:font script="Cher" typeface="Plantagenet Cherokee"/>
-        <a:font script="Yiii" typeface="Microsoft Yi Baiti"/>
-        <a:font script="Tibt" typeface="Microsoft Himalaya"/>
-        <a:font script="Thaa" typeface="MV Boli"/>
-        <a:font script="Deva" typeface="Mangal"/>
-        <a:font script="Telu" typeface="Gautami"/>
-        <a:font script="Taml" typeface="Latha"/>
-        <a:font script="Syrc" typeface="Estrangelo Edessa"/>
-        <a:font script="Orya" typeface="Kalinga"/>
-        <a:font script="Mlym" typeface="Kartika"/>
-        <a:font script="Laoo" typeface="DokChampa"/>
-        <a:font script="Sinh" typeface="Iskoola Pota"/>
-        <a:font script="Mong" typeface="Mongolian Baiti"/>
-        <a:font script="Viet" typeface="Arial"/>
-        <a:font script="Uigh" typeface="Microsoft Uighur"/>
-        <a:font script="Geor" typeface="Sylfaen"/>
-      </a:minorFont>
-    </a:fontScheme>
-    <a:fmtScheme name="Office">
-      <a:fillStyleLst>
-        <a:solidFill>
-          <a:schemeClr val="phClr"/>
-        </a:solidFill>
-        <a:gradFill rotWithShape="1">
-          <a:gsLst>
-            <a:gs pos="0">
-              <a:schemeClr val="phClr">
-                <a:tint val="50000"/>
-                <a:satMod val="300000"/>
-              </a:schemeClr>
-            </a:gs>
-            <a:gs pos="35000">
-              <a:schemeClr val="phClr">
-                <a:tint val="37000"/>
-                <a:satMod val="300000"/>
-              </a:schemeClr>
-            </a:gs>
-            <a:gs pos="100000">
-              <a:schemeClr val="phClr">
-                <a:tint val="15000"/>
-                <a:satMod val="350000"/>
-              </a:schemeClr>
-            </a:gs>
-          </a:gsLst>
-          <a:lin ang="16200000" scaled="1"/>
-        </a:gradFill>
-        <a:gradFill rotWithShape="1">
-          <a:gsLst>
-            <a:gs pos="0">
-              <a:schemeClr val="phClr">
-                <a:tint val="100000"/>
-                <a:shade val="100000"/>
-                <a:satMod val="130000"/>
-              </a:schemeClr>
-            </a:gs>
-            <a:gs pos="100000">
-              <a:schemeClr val="phClr">
-                <a:tint val="50000"/>
-                <a:shade val="100000"/>
-                <a:satMod val="350000"/>
-              </a:schemeClr>
-            </a:gs>
-          </a:gsLst>
-          <a:lin ang="16200000" scaled="0"/>
-        </a:gradFill>
-      </a:fillStyleLst>
-      <a:lnStyleLst>
-        <a:ln w="9525" cap="flat" cmpd="sng" algn="ctr">
-          <a:solidFill>
-            <a:schemeClr val="phClr">
-              <a:shade val="95000"/>
-              <a:satMod val="105000"/>
-            </a:schemeClr>
-          </a:solidFill>
-          <a:prstDash val="solid"/>
-        </a:ln>
-        <a:ln w="25400" cap="flat" cmpd="sng" algn="ctr">
-          <a:solidFill>
-            <a:schemeClr val="phClr"/>
-          </a:solidFill>
-          <a:prstDash val="solid"/>
-        </a:ln>
-        <a:ln w="38100" cap="flat" cmpd="sng" algn="ctr">
-          <a:solidFill>
-            <a:schemeClr val="phClr"/>
-          </a:solidFill>
-          <a:prstDash val="solid"/>
-        </a:ln>
-      </a:lnStyleLst>
-      <a:effectStyleLst>
-        <a:effectStyle>
-          <a:effectLst>
-            <a:outerShdw blurRad="40000" dist="20000" dir="5400000" rotWithShape="0">
-              <a:srgbClr val="000000">
-                <a:alpha val="38000"/>
-              </a:srgbClr>
-            </a:outerShdw>
-          </a:effectLst>
-        </a:effectStyle>
-        <a:effectStyle>
-          <a:effectLst>
-            <a:outerShdw blurRad="40000" dist="23000" dir="5400000" rotWithShape="0">
-              <a:srgbClr val="000000">
-                <a:alpha val="35000"/>
-              </a:srgbClr>
-            </a:outerShdw>
-          </a:effectLst>
-        </a:effectStyle>
-        <a:effectStyle>
-          <a:effectLst>
-            <a:outerShdw blurRad="40000" dist="23000" dir="5400000" rotWithShape="0">
-              <a:srgbClr val="000000">
-                <a:alpha val="35000"/>
-              </a:srgbClr>
-            </a:outerShdw>
-          </a:effectLst>
-          <a:scene3d>
-            <a:camera prst="orthographicFront">
-              <a:rot lat="0" lon="0" rev="0"/>
-            </a:camera>
-            <a:lightRig rig="threePt" dir="t">
-              <a:rot lat="0" lon="0" rev="1200000"/>
-            </a:lightRig>
-          </a:scene3d>
-          <a:sp3d>
-            <a:bevelT w="63500" h="25400"/>
-          </a:sp3d>
-        </a:effectStyle>
-      </a:effectStyleLst>
-      <a:bgFillStyleLst>
-        <a:solidFill>
-          <a:schemeClr val="phClr"/>
-        </a:solidFill>
-        <a:gradFill rotWithShape="1">
-          <a:gsLst>
-            <a:gs pos="0">
-              <a:schemeClr val="phClr">
-                <a:tint val="40000"/>
-                <a:satMod val="350000"/>
-              </a:schemeClr>
-            </a:gs>
-            <a:gs pos="40000">
-              <a:schemeClr val="phClr">
-                <a:tint val="45000"/>
-                <a:shade val="99000"/>
-                <a:satMod val="350000"/>
-              </a:schemeClr>
-            </a:gs>
-            <a:gs pos="100000">
-              <a:schemeClr val="phClr">
-                <a:shade val="20000"/>
-                <a:satMod val="255000"/>
-              </a:schemeClr>
-            </a:gs>
-          </a:gsLst>
-          <a:path path="circle">
-            <a:fillToRect l="50000" t="-80000" r="50000" b="180000"/>
-          </a:path>
-        </a:gradFill>
-        <a:gradFill rotWithShape="1">
-          <a:gsLst>
-            <a:gs pos="0">
-              <a:schemeClr val="phClr">
-                <a:tint val="80000"/>
-                <a:satMod val="300000"/>
-              </a:schemeClr>
-            </a:gs>
-            <a:gs pos="100000">
-              <a:schemeClr val="phClr">
-                <a:shade val="30000"/>
-                <a:satMod val="200000"/>
-              </a:schemeClr>
-            </a:gs>
-          </a:gsLst>
-          <a:path path="circle">
-            <a:fillToRect l="50000" t="50000" r="50000" b="50000"/>
-          </a:path>
-        </a:gradFill>
-      </a:bgFillStyleLst>
-    </a:fmtScheme>
-  </a:themeElements>
-</a:theme>
 </file>
--- a/School deliverables/presentation/Unmasking Go Ransomware.pptx
+++ b/School deliverables/presentation/Unmasking Go Ransomware.pptx
@@ -758,16 +758,29 @@
           <a:lstStyle/>
           <a:p>
             <a:pPr indent="0" lvl="0" marL="0" rtl="0" algn="l">
-              <a:spcBef>
-                <a:spcPts val="0"/>
-              </a:spcBef>
-              <a:spcAft>
-                <a:spcPts val="0"/>
-              </a:spcAft>
+              <a:lnSpc>
+                <a:spcPct val="115000"/>
+              </a:lnSpc>
+              <a:spcBef>
+                <a:spcPts val="1200"/>
+              </a:spcBef>
+              <a:spcAft>
+                <a:spcPts val="1200"/>
+              </a:spcAft>
+              <a:buClr>
+                <a:schemeClr val="dk1"/>
+              </a:buClr>
+              <a:buSzPts val="1100"/>
+              <a:buFont typeface="Arial"/>
               <a:buNone/>
             </a:pPr>
             <a:r>
-              <a:t/>
+              <a:rPr lang="en-US">
+                <a:solidFill>
+                  <a:schemeClr val="dk1"/>
+                </a:solidFill>
+              </a:rPr>
+              <a:t>"Hello everyone and Professor Jenkins. My name is William Elias and this is my presentation for INFA 723. Today I will demonstrate the development of Python based defensive tooling designed specifically to counter advanced Go ransomware payloads. Coming from a background in production support engineering I have witnessed how the efficiency of the Go language is being weaponized to bypass traditional security architectures. This project focuses on unmasking those threats through mathematical and structural analysis."</a:t>
             </a:r>
             <a:endParaRPr/>
           </a:p>
@@ -857,8 +870,40 @@
           <a:lstStyle/>
           <a:p>
             <a:pPr indent="0" lvl="0" marL="0" rtl="0" algn="l">
-              <a:spcBef>
-                <a:spcPts val="0"/>
+              <a:lnSpc>
+                <a:spcPct val="115000"/>
+              </a:lnSpc>
+              <a:spcBef>
+                <a:spcPts val="1200"/>
+              </a:spcBef>
+              <a:spcAft>
+                <a:spcPts val="0"/>
+              </a:spcAft>
+              <a:buClr>
+                <a:schemeClr val="dk1"/>
+              </a:buClr>
+              <a:buSzPts val="1100"/>
+              <a:buFont typeface="Arial"/>
+              <a:buNone/>
+            </a:pPr>
+            <a:r>
+              <a:rPr lang="en-US">
+                <a:solidFill>
+                  <a:schemeClr val="dk1"/>
+                </a:solidFill>
+              </a:rPr>
+              <a:t>"Threat actors often strip the symbol tables from their binaries to hide function names and frustrate malware analysts. However they cannot easily hide the fundamental architecture of the Go compiler. The Go runtime requires a specific table called the Program Counter Line Number Table to manage memory and stack traces. I developed a Python script using the PEfile library to parse the portable executable headers of a suspicious binary. By locating this hidden runtime structure we can definitively identify a binary as a Go artifact even if it has been stripped of all debugging symbols."</a:t>
+            </a:r>
+            <a:endParaRPr>
+              <a:solidFill>
+                <a:schemeClr val="dk1"/>
+              </a:solidFill>
+            </a:endParaRPr>
+          </a:p>
+          <a:p>
+            <a:pPr indent="0" lvl="0" marL="0" rtl="0" algn="l">
+              <a:spcBef>
+                <a:spcPts val="1200"/>
               </a:spcBef>
               <a:spcAft>
                 <a:spcPts val="0"/>
@@ -868,7 +913,11 @@
             <a:r>
               <a:t/>
             </a:r>
-            <a:endParaRPr/>
+            <a:endParaRPr>
+              <a:solidFill>
+                <a:schemeClr val="dk1"/>
+              </a:solidFill>
+            </a:endParaRPr>
           </a:p>
         </p:txBody>
       </p:sp>
@@ -956,8 +1005,40 @@
           <a:lstStyle/>
           <a:p>
             <a:pPr indent="0" lvl="0" marL="0" rtl="0" algn="l">
-              <a:spcBef>
-                <a:spcPts val="0"/>
+              <a:lnSpc>
+                <a:spcPct val="115000"/>
+              </a:lnSpc>
+              <a:spcBef>
+                <a:spcPts val="1200"/>
+              </a:spcBef>
+              <a:spcAft>
+                <a:spcPts val="0"/>
+              </a:spcAft>
+              <a:buClr>
+                <a:schemeClr val="dk1"/>
+              </a:buClr>
+              <a:buSzPts val="1100"/>
+              <a:buFont typeface="Arial"/>
+              <a:buNone/>
+            </a:pPr>
+            <a:r>
+              <a:rPr lang="en-US">
+                <a:solidFill>
+                  <a:schemeClr val="dk1"/>
+                </a:solidFill>
+              </a:rPr>
+              <a:t> "For the deployment of this project I utilized the 'uv' environment manager. This tool provides exceptionally fast dependency resolution which is vital for security applications. The pipeline relies on three primary Python libraries: PEfile for header parsing SciPy for entropy calculations and NumPy for byte distribution analysis. The central configuration is managed through a JSON file allowing for rapid adjustment of entropy thresholds and target directories without modifying the underlying source code."</a:t>
+            </a:r>
+            <a:endParaRPr>
+              <a:solidFill>
+                <a:schemeClr val="dk1"/>
+              </a:solidFill>
+            </a:endParaRPr>
+          </a:p>
+          <a:p>
+            <a:pPr indent="0" lvl="0" marL="0" rtl="0" algn="l">
+              <a:spcBef>
+                <a:spcPts val="1200"/>
               </a:spcBef>
               <a:spcAft>
                 <a:spcPts val="0"/>
@@ -1055,8 +1136,40 @@
           <a:lstStyle/>
           <a:p>
             <a:pPr indent="0" lvl="0" marL="0" rtl="0" algn="l">
-              <a:spcBef>
-                <a:spcPts val="0"/>
+              <a:lnSpc>
+                <a:spcPct val="115000"/>
+              </a:lnSpc>
+              <a:spcBef>
+                <a:spcPts val="1200"/>
+              </a:spcBef>
+              <a:spcAft>
+                <a:spcPts val="0"/>
+              </a:spcAft>
+              <a:buClr>
+                <a:schemeClr val="dk1"/>
+              </a:buClr>
+              <a:buSzPts val="1100"/>
+              <a:buFont typeface="Arial"/>
+              <a:buNone/>
+            </a:pPr>
+            <a:r>
+              <a:rPr lang="en-US">
+                <a:solidFill>
+                  <a:schemeClr val="dk1"/>
+                </a:solidFill>
+              </a:rPr>
+              <a:t>"In a production environment we must account for legitimate high entropy data such as ZIP files or encrypted backups. To mitigate false positives the detection model should be layered with secondary logic. This includes monitoring the velocity of file changes and verifying file extensions. A user manually creating a compressed archive is a slow event while a Go ransomware payload using concurrent goroutines is an exceptionally high velocity event. Combining entropy with velocity thresholds ensures the system remains accurate in complex enterprise environments."</a:t>
+            </a:r>
+            <a:endParaRPr>
+              <a:solidFill>
+                <a:schemeClr val="dk1"/>
+              </a:solidFill>
+            </a:endParaRPr>
+          </a:p>
+          <a:p>
+            <a:pPr indent="0" lvl="0" marL="0" rtl="0" algn="l">
+              <a:spcBef>
+                <a:spcPts val="1200"/>
               </a:spcBef>
               <a:spcAft>
                 <a:spcPts val="0"/>
@@ -1066,7 +1179,11 @@
             <a:r>
               <a:t/>
             </a:r>
-            <a:endParaRPr/>
+            <a:endParaRPr>
+              <a:solidFill>
+                <a:schemeClr val="dk1"/>
+              </a:solidFill>
+            </a:endParaRPr>
           </a:p>
         </p:txBody>
       </p:sp>
@@ -1154,8 +1271,40 @@
           <a:lstStyle/>
           <a:p>
             <a:pPr indent="0" lvl="0" marL="0" rtl="0" algn="l">
-              <a:spcBef>
-                <a:spcPts val="0"/>
+              <a:lnSpc>
+                <a:spcPct val="115000"/>
+              </a:lnSpc>
+              <a:spcBef>
+                <a:spcPts val="1200"/>
+              </a:spcBef>
+              <a:spcAft>
+                <a:spcPts val="0"/>
+              </a:spcAft>
+              <a:buClr>
+                <a:schemeClr val="dk1"/>
+              </a:buClr>
+              <a:buSzPts val="1100"/>
+              <a:buFont typeface="Arial"/>
+              <a:buNone/>
+            </a:pPr>
+            <a:r>
+              <a:rPr lang="en-US">
+                <a:solidFill>
+                  <a:schemeClr val="dk1"/>
+                </a:solidFill>
+              </a:rPr>
+              <a:t>"The results of the simulation were definitive. Against a custom Go simulator spawning one hundred concurrent encryption threads the Python monitor achieved a perfect one hundred percent detection rate. Every malicious file modification triggered a critical alert. Conversely the baseline testing with standard text data resulted in zero false positives. Furthermore the static analyzer successfully identified the Go runtime artifacts in the stripped simulator binary every time. These results prove that mathematical and structural analysis can reliably unmask modern Go malware."</a:t>
+            </a:r>
+            <a:endParaRPr>
+              <a:solidFill>
+                <a:schemeClr val="dk1"/>
+              </a:solidFill>
+            </a:endParaRPr>
+          </a:p>
+          <a:p>
+            <a:pPr indent="0" lvl="0" marL="0" rtl="0" algn="l">
+              <a:spcBef>
+                <a:spcPts val="1200"/>
               </a:spcBef>
               <a:spcAft>
                 <a:spcPts val="0"/>
@@ -1253,16 +1402,29 @@
           <a:lstStyle/>
           <a:p>
             <a:pPr indent="0" lvl="0" marL="0" rtl="0" algn="l">
-              <a:spcBef>
-                <a:spcPts val="0"/>
-              </a:spcBef>
-              <a:spcAft>
-                <a:spcPts val="0"/>
-              </a:spcAft>
+              <a:lnSpc>
+                <a:spcPct val="115000"/>
+              </a:lnSpc>
+              <a:spcBef>
+                <a:spcPts val="1200"/>
+              </a:spcBef>
+              <a:spcAft>
+                <a:spcPts val="1200"/>
+              </a:spcAft>
+              <a:buClr>
+                <a:schemeClr val="dk1"/>
+              </a:buClr>
+              <a:buSzPts val="1100"/>
+              <a:buFont typeface="Arial"/>
               <a:buNone/>
             </a:pPr>
             <a:r>
-              <a:t/>
+              <a:rPr lang="en-US">
+                <a:solidFill>
+                  <a:schemeClr val="dk1"/>
+                </a:solidFill>
+              </a:rPr>
+              <a:t>"By combining real time entropy checks with static header analysis we can identify and interrupt aggressive Go payloads before catastrophic data loss occurs. This concludes my presentation on unmasking Go ransomware.”</a:t>
             </a:r>
             <a:endParaRPr/>
           </a:p>
@@ -1352,8 +1514,40 @@
           <a:lstStyle/>
           <a:p>
             <a:pPr indent="0" lvl="0" marL="0" rtl="0" algn="l">
-              <a:spcBef>
-                <a:spcPts val="0"/>
+              <a:lnSpc>
+                <a:spcPct val="115000"/>
+              </a:lnSpc>
+              <a:spcBef>
+                <a:spcPts val="1200"/>
+              </a:spcBef>
+              <a:spcAft>
+                <a:spcPts val="0"/>
+              </a:spcAft>
+              <a:buClr>
+                <a:schemeClr val="dk1"/>
+              </a:buClr>
+              <a:buSzPts val="1100"/>
+              <a:buFont typeface="Arial"/>
+              <a:buNone/>
+            </a:pPr>
+            <a:r>
+              <a:rPr lang="en-US">
+                <a:solidFill>
+                  <a:schemeClr val="dk1"/>
+                </a:solidFill>
+              </a:rPr>
+              <a:t>Thank you for your time and I am happy to answer any questions by email or messages.</a:t>
+            </a:r>
+            <a:endParaRPr>
+              <a:solidFill>
+                <a:schemeClr val="dk1"/>
+              </a:solidFill>
+            </a:endParaRPr>
+          </a:p>
+          <a:p>
+            <a:pPr indent="0" lvl="0" marL="0" rtl="0" algn="l">
+              <a:spcBef>
+                <a:spcPts val="1200"/>
               </a:spcBef>
               <a:spcAft>
                 <a:spcPts val="0"/>
@@ -1550,18 +1744,52 @@
           <a:lstStyle/>
           <a:p>
             <a:pPr indent="0" lvl="0" marL="0" rtl="0" algn="l">
-              <a:spcBef>
-                <a:spcPts val="0"/>
-              </a:spcBef>
-              <a:spcAft>
-                <a:spcPts val="0"/>
+              <a:lnSpc>
+                <a:spcPct val="115000"/>
+              </a:lnSpc>
+              <a:spcBef>
+                <a:spcPts val="1200"/>
+              </a:spcBef>
+              <a:spcAft>
+                <a:spcPts val="0"/>
+              </a:spcAft>
+              <a:buNone/>
+            </a:pPr>
+            <a:r>
+              <a:rPr lang="en-US">
+                <a:solidFill>
+                  <a:schemeClr val="dk1"/>
+                </a:solidFill>
+              </a:rPr>
+              <a:t>"We begin by examining why the threat landscape has shifted so dramatically toward this specific programming language."</a:t>
+            </a:r>
+            <a:endParaRPr>
+              <a:solidFill>
+                <a:schemeClr val="dk1"/>
+              </a:solidFill>
+            </a:endParaRPr>
+          </a:p>
+          <a:p>
+            <a:pPr indent="0" lvl="0" marL="0" rtl="0" algn="l">
+              <a:lnSpc>
+                <a:spcPct val="115000"/>
+              </a:lnSpc>
+              <a:spcBef>
+                <a:spcPts val="1200"/>
+              </a:spcBef>
+              <a:spcAft>
+                <a:spcPts val="1200"/>
               </a:spcAft>
               <a:buNone/>
             </a:pPr>
             <a:r>
               <a:t/>
             </a:r>
-            <a:endParaRPr/>
+            <a:endParaRPr>
+              <a:solidFill>
+                <a:schemeClr val="dk1"/>
+              </a:solidFill>
+            </a:endParaRPr>
           </a:p>
         </p:txBody>
       </p:sp>
@@ -1649,8 +1877,40 @@
           <a:lstStyle/>
           <a:p>
             <a:pPr indent="0" lvl="0" marL="0" rtl="0" algn="l">
-              <a:spcBef>
-                <a:spcPts val="0"/>
+              <a:lnSpc>
+                <a:spcPct val="115000"/>
+              </a:lnSpc>
+              <a:spcBef>
+                <a:spcPts val="1200"/>
+              </a:spcBef>
+              <a:spcAft>
+                <a:spcPts val="0"/>
+              </a:spcAft>
+              <a:buClr>
+                <a:schemeClr val="dk1"/>
+              </a:buClr>
+              <a:buSzPts val="1100"/>
+              <a:buFont typeface="Arial"/>
+              <a:buNone/>
+            </a:pPr>
+            <a:r>
+              <a:rPr lang="en-US">
+                <a:solidFill>
+                  <a:schemeClr val="dk1"/>
+                </a:solidFill>
+              </a:rPr>
+              <a:t>"Modern threat actors are moving away from legacy languages in favor of Go because of three distinct advantages. First is the ease of cross platform compilation which allows a single development team to target Windows Linux and hypervisor environments simultaneously. Second is the efficiency of native concurrency which maximizes hardware throughput during encryption. Finally Go binaries are statically linked meaning they are self contained blobs of code that do not rely on external dynamic link libraries. This makes them exceptionally difficult to analyze using traditional signature based scanning."</a:t>
+            </a:r>
+            <a:endParaRPr>
+              <a:solidFill>
+                <a:schemeClr val="dk1"/>
+              </a:solidFill>
+            </a:endParaRPr>
+          </a:p>
+          <a:p>
+            <a:pPr indent="0" lvl="0" marL="0" rtl="0" algn="l">
+              <a:spcBef>
+                <a:spcPts val="1200"/>
               </a:spcBef>
               <a:spcAft>
                 <a:spcPts val="0"/>
@@ -1748,8 +2008,40 @@
           <a:lstStyle/>
           <a:p>
             <a:pPr indent="0" lvl="0" marL="0" rtl="0" algn="l">
-              <a:spcBef>
-                <a:spcPts val="0"/>
+              <a:lnSpc>
+                <a:spcPct val="115000"/>
+              </a:lnSpc>
+              <a:spcBef>
+                <a:spcPts val="1200"/>
+              </a:spcBef>
+              <a:spcAft>
+                <a:spcPts val="0"/>
+              </a:spcAft>
+              <a:buClr>
+                <a:schemeClr val="dk1"/>
+              </a:buClr>
+              <a:buSzPts val="1100"/>
+              <a:buFont typeface="Arial"/>
+              <a:buNone/>
+            </a:pPr>
+            <a:r>
+              <a:rPr lang="en-US">
+                <a:solidFill>
+                  <a:schemeClr val="dk1"/>
+                </a:solidFill>
+              </a:rPr>
+              <a:t> "The true destructive power of Go ransomware lies in the implementation of goroutines. Unlike standard operating system threads goroutines are lightweight execution units managed by the Go runtime scheduler. In a ransomware context this is weaponized to maximize disk input and output. Instead of encrypting files one by one the payload assigns a goroutine to every discovered file simultaneously. This creates a massive parallel processing event that can encrypt thousands of documents in seconds overwhelming the host system before defensive tools can intervene. My research focuses on catching this exact behavior."</a:t>
+            </a:r>
+            <a:endParaRPr>
+              <a:solidFill>
+                <a:schemeClr val="dk1"/>
+              </a:solidFill>
+            </a:endParaRPr>
+          </a:p>
+          <a:p>
+            <a:pPr indent="0" lvl="0" marL="0" rtl="0" algn="l">
+              <a:spcBef>
+                <a:spcPts val="1200"/>
               </a:spcBef>
               <a:spcAft>
                 <a:spcPts val="0"/>
@@ -1847,8 +2139,40 @@
           <a:lstStyle/>
           <a:p>
             <a:pPr indent="0" lvl="0" marL="0" rtl="0" algn="l">
-              <a:spcBef>
-                <a:spcPts val="0"/>
+              <a:lnSpc>
+                <a:spcPct val="115000"/>
+              </a:lnSpc>
+              <a:spcBef>
+                <a:spcPts val="1200"/>
+              </a:spcBef>
+              <a:spcAft>
+                <a:spcPts val="0"/>
+              </a:spcAft>
+              <a:buClr>
+                <a:schemeClr val="dk1"/>
+              </a:buClr>
+              <a:buSzPts val="1100"/>
+              <a:buFont typeface="Arial"/>
+              <a:buNone/>
+            </a:pPr>
+            <a:r>
+              <a:rPr lang="en-US">
+                <a:solidFill>
+                  <a:schemeClr val="dk1"/>
+                </a:solidFill>
+              </a:rPr>
+              <a:t>"To stop these high speed attacks we must move away from easily evaded signatures and focus on the immutable mathematical footprint of encryption."</a:t>
+            </a:r>
+            <a:endParaRPr>
+              <a:solidFill>
+                <a:schemeClr val="dk1"/>
+              </a:solidFill>
+            </a:endParaRPr>
+          </a:p>
+          <a:p>
+            <a:pPr indent="0" lvl="0" marL="0" rtl="0" algn="l">
+              <a:spcBef>
+                <a:spcPts val="1200"/>
               </a:spcBef>
               <a:spcAft>
                 <a:spcPts val="0"/>
@@ -1946,8 +2270,40 @@
           <a:lstStyle/>
           <a:p>
             <a:pPr indent="0" lvl="0" marL="0" rtl="0" algn="l">
-              <a:spcBef>
-                <a:spcPts val="0"/>
+              <a:lnSpc>
+                <a:spcPct val="115000"/>
+              </a:lnSpc>
+              <a:spcBef>
+                <a:spcPts val="1200"/>
+              </a:spcBef>
+              <a:spcAft>
+                <a:spcPts val="0"/>
+              </a:spcAft>
+              <a:buClr>
+                <a:schemeClr val="dk1"/>
+              </a:buClr>
+              <a:buSzPts val="1100"/>
+              <a:buFont typeface="Arial"/>
+              <a:buNone/>
+            </a:pPr>
+            <a:r>
+              <a:rPr lang="en-US">
+                <a:solidFill>
+                  <a:schemeClr val="dk1"/>
+                </a:solidFill>
+              </a:rPr>
+              <a:t>"The core of my dynamic detection strategy is the application of Shannon entropy. Entropy is a mathematical measure of the uncertainty or randomness within a data set. A standard text document has predictable patterns and low randomness which results in a low entropy score. However a file encrypted with a modern cipher like AES 256 creates a nearly uniform distribution of bytes. By leveraging the SciPy library my Python monitor calculates this randomness in real time as files are written to the disk. This allows us to identify the cryptographic signature of an attack regardless of what techniques the malware uses to obscure its execution path."</a:t>
+            </a:r>
+            <a:endParaRPr>
+              <a:solidFill>
+                <a:schemeClr val="dk1"/>
+              </a:solidFill>
+            </a:endParaRPr>
+          </a:p>
+          <a:p>
+            <a:pPr indent="0" lvl="0" marL="0" rtl="0" algn="l">
+              <a:spcBef>
+                <a:spcPts val="1200"/>
               </a:spcBef>
               <a:spcAft>
                 <a:spcPts val="0"/>
@@ -2045,8 +2401,40 @@
           <a:lstStyle/>
           <a:p>
             <a:pPr indent="0" lvl="0" marL="0" rtl="0" algn="l">
-              <a:spcBef>
-                <a:spcPts val="0"/>
+              <a:lnSpc>
+                <a:spcPct val="115000"/>
+              </a:lnSpc>
+              <a:spcBef>
+                <a:spcPts val="1200"/>
+              </a:spcBef>
+              <a:spcAft>
+                <a:spcPts val="0"/>
+              </a:spcAft>
+              <a:buClr>
+                <a:schemeClr val="dk1"/>
+              </a:buClr>
+              <a:buSzPts val="1100"/>
+              <a:buFont typeface="Arial"/>
+              <a:buNone/>
+            </a:pPr>
+            <a:r>
+              <a:rPr lang="en-US">
+                <a:solidFill>
+                  <a:schemeClr val="dk1"/>
+                </a:solidFill>
+              </a:rPr>
+              <a:t>"In information theory the absolute limit for an eight bit byte is a score of exactly eight point zero. This represents absolute randomness where every byte value has an equal probability of appearing. My detection tool uses a critical threshold of seven point nine five. Most legitimate files, even highly compressed databases rarely approach this limit. However the pseudorandom output of ransomware encryption loops consistently registers at the very top of this scale. By focusing on this mathematical certainty we can trigger a critical alert the moment the encryption loop begins."</a:t>
+            </a:r>
+            <a:endParaRPr>
+              <a:solidFill>
+                <a:schemeClr val="dk1"/>
+              </a:solidFill>
+            </a:endParaRPr>
+          </a:p>
+          <a:p>
+            <a:pPr indent="0" lvl="0" marL="0" rtl="0" algn="l">
+              <a:spcBef>
+                <a:spcPts val="1200"/>
               </a:spcBef>
               <a:spcAft>
                 <a:spcPts val="0"/>
@@ -2144,8 +2532,40 @@
           <a:lstStyle/>
           <a:p>
             <a:pPr indent="0" lvl="0" marL="0" rtl="0" algn="l">
-              <a:spcBef>
-                <a:spcPts val="0"/>
+              <a:lnSpc>
+                <a:spcPct val="115000"/>
+              </a:lnSpc>
+              <a:spcBef>
+                <a:spcPts val="1200"/>
+              </a:spcBef>
+              <a:spcAft>
+                <a:spcPts val="0"/>
+              </a:spcAft>
+              <a:buClr>
+                <a:schemeClr val="dk1"/>
+              </a:buClr>
+              <a:buSzPts val="1100"/>
+              <a:buFont typeface="Arial"/>
+              <a:buNone/>
+            </a:pPr>
+            <a:r>
+              <a:rPr lang="en-US">
+                <a:solidFill>
+                  <a:schemeClr val="dk1"/>
+                </a:solidFill>
+              </a:rPr>
+              <a:t>"To validate this model I performed extensive comparative testing. As you can see on the screen a standard plain text document registers an entropy score of roughly four point one while a SQLite database sits around five point four. These are well within the safe zone. In contrast, files modified by my Go ransomware simulator consistently hit scores of seven point nine nine and eight point zero. This clear mathematical gap is what allows our Python tooling to distinguish between normal user activity and a weaponized payload with high precision."</a:t>
+            </a:r>
+            <a:endParaRPr>
+              <a:solidFill>
+                <a:schemeClr val="dk1"/>
+              </a:solidFill>
+            </a:endParaRPr>
+          </a:p>
+          <a:p>
+            <a:pPr indent="0" lvl="0" marL="0" rtl="0" algn="l">
+              <a:spcBef>
+                <a:spcPts val="1200"/>
               </a:spcBef>
               <a:spcAft>
                 <a:spcPts val="0"/>
@@ -2243,8 +2663,40 @@
           <a:lstStyle/>
           <a:p>
             <a:pPr indent="0" lvl="0" marL="0" rtl="0" algn="l">
-              <a:spcBef>
-                <a:spcPts val="0"/>
+              <a:lnSpc>
+                <a:spcPct val="115000"/>
+              </a:lnSpc>
+              <a:spcBef>
+                <a:spcPts val="1200"/>
+              </a:spcBef>
+              <a:spcAft>
+                <a:spcPts val="0"/>
+              </a:spcAft>
+              <a:buClr>
+                <a:schemeClr val="dk1"/>
+              </a:buClr>
+              <a:buSzPts val="1100"/>
+              <a:buFont typeface="Arial"/>
+              <a:buNone/>
+            </a:pPr>
+            <a:r>
+              <a:rPr lang="en-US">
+                <a:solidFill>
+                  <a:schemeClr val="dk1"/>
+                </a:solidFill>
+              </a:rPr>
+              <a:t>"While dynamic monitoring catches the execution we also need a way to unmask dormant binaries even when they are obfuscated."</a:t>
+            </a:r>
+            <a:endParaRPr>
+              <a:solidFill>
+                <a:schemeClr val="dk1"/>
+              </a:solidFill>
+            </a:endParaRPr>
+          </a:p>
+          <a:p>
+            <a:pPr indent="0" lvl="0" marL="0" rtl="0" algn="l">
+              <a:spcBef>
+                <a:spcPts val="1200"/>
               </a:spcBef>
               <a:spcAft>
                 <a:spcPts val="0"/>
@@ -16631,7 +17083,7 @@
             <a:tbl>
               <a:tblPr bandRow="1" firstRow="1">
                 <a:noFill/>
-                <a:tableStyleId>{5BD91738-F0D5-4590-AA49-023E812DB9F7}</a:tableStyleId>
+                <a:tableStyleId>{8612BC06-C8F2-4C54-B171-4750FFAA8043}</a:tableStyleId>
               </a:tblPr>
               <a:tblGrid>
                 <a:gridCol w="2114550"/>
